--- a/slides/2-2_machine_checkout/2-2_machine_checkout.pptx
+++ b/slides/2-2_machine_checkout/2-2_machine_checkout.pptx
@@ -2223,7 +2223,7 @@
           <a:ln/>
         </p:spPr>
         <p:txBody>
-          <a:bodyPr wrap="square" lIns="0" tIns="0" rIns="0" bIns="0" rtlCol="0" anchor="ctr"/>
+          <a:bodyPr wrap="none" lIns="0" tIns="0" rIns="0" bIns="0" rtlCol="0" anchor="ctr"/>
           <a:lstStyle/>
           <a:p>
             <a:pPr algn="ctr" indent="0" marL="0">
@@ -2266,7 +2266,7 @@
           <a:ln/>
         </p:spPr>
         <p:txBody>
-          <a:bodyPr wrap="square" lIns="0" tIns="0" rIns="0" bIns="0" rtlCol="0" anchor="ctr"/>
+          <a:bodyPr wrap="none" lIns="0" tIns="0" rIns="0" bIns="0" rtlCol="0" anchor="ctr"/>
           <a:lstStyle/>
           <a:p>
             <a:pPr algn="ctr" indent="0" marL="0">
@@ -2309,7 +2309,7 @@
           <a:ln/>
         </p:spPr>
         <p:txBody>
-          <a:bodyPr wrap="square" lIns="0" tIns="0" rIns="0" bIns="0" rtlCol="0" anchor="ctr"/>
+          <a:bodyPr wrap="none" lIns="0" tIns="0" rIns="0" bIns="0" rtlCol="0" anchor="ctr"/>
           <a:lstStyle/>
           <a:p>
             <a:pPr algn="ctr" indent="0" marL="0">
@@ -2352,7 +2352,7 @@
           <a:ln/>
         </p:spPr>
         <p:txBody>
-          <a:bodyPr wrap="square" lIns="0" tIns="0" rIns="0" bIns="0" rtlCol="0" anchor="ctr"/>
+          <a:bodyPr wrap="none" lIns="0" tIns="0" rIns="0" bIns="0" rtlCol="0" anchor="ctr"/>
           <a:lstStyle/>
           <a:p>
             <a:pPr algn="ctr" indent="0" marL="0">
@@ -2395,7 +2395,7 @@
           <a:ln/>
         </p:spPr>
         <p:txBody>
-          <a:bodyPr wrap="square" lIns="0" tIns="0" rIns="0" bIns="0" rtlCol="0" anchor="ctr"/>
+          <a:bodyPr wrap="none" lIns="0" tIns="0" rIns="0" bIns="0" rtlCol="0" anchor="ctr"/>
           <a:lstStyle/>
           <a:p>
             <a:pPr algn="ctr" indent="0" marL="0">
@@ -2756,7 +2756,7 @@
           <a:ln/>
         </p:spPr>
         <p:txBody>
-          <a:bodyPr wrap="square" lIns="0" tIns="0" rIns="0" bIns="0" rtlCol="0" anchor="ctr"/>
+          <a:bodyPr wrap="none" lIns="0" tIns="0" rIns="0" bIns="0" rtlCol="0" anchor="ctr"/>
           <a:lstStyle/>
           <a:p>
             <a:pPr algn="ctr" indent="0" marL="0">
@@ -2799,7 +2799,7 @@
           <a:ln/>
         </p:spPr>
         <p:txBody>
-          <a:bodyPr wrap="square" lIns="0" tIns="0" rIns="0" bIns="0" rtlCol="0" anchor="ctr"/>
+          <a:bodyPr wrap="none" lIns="0" tIns="0" rIns="0" bIns="0" rtlCol="0" anchor="ctr"/>
           <a:lstStyle/>
           <a:p>
             <a:pPr algn="ctr" indent="0" marL="0">
@@ -2842,7 +2842,7 @@
           <a:ln/>
         </p:spPr>
         <p:txBody>
-          <a:bodyPr wrap="square" lIns="0" tIns="0" rIns="0" bIns="0" rtlCol="0" anchor="ctr"/>
+          <a:bodyPr wrap="none" lIns="0" tIns="0" rIns="0" bIns="0" rtlCol="0" anchor="ctr"/>
           <a:lstStyle/>
           <a:p>
             <a:pPr algn="ctr" indent="0" marL="0">
@@ -2885,7 +2885,7 @@
           <a:ln/>
         </p:spPr>
         <p:txBody>
-          <a:bodyPr wrap="square" lIns="0" tIns="0" rIns="0" bIns="0" rtlCol="0" anchor="ctr"/>
+          <a:bodyPr wrap="none" lIns="0" tIns="0" rIns="0" bIns="0" rtlCol="0" anchor="ctr"/>
           <a:lstStyle/>
           <a:p>
             <a:pPr algn="ctr" indent="0" marL="0">
@@ -2928,7 +2928,7 @@
           <a:ln/>
         </p:spPr>
         <p:txBody>
-          <a:bodyPr wrap="square" lIns="0" tIns="0" rIns="0" bIns="0" rtlCol="0" anchor="ctr"/>
+          <a:bodyPr wrap="none" lIns="0" tIns="0" rIns="0" bIns="0" rtlCol="0" anchor="ctr"/>
           <a:lstStyle/>
           <a:p>
             <a:pPr algn="ctr" indent="0" marL="0">
@@ -3679,7 +3679,7 @@
           <a:ln/>
         </p:spPr>
         <p:txBody>
-          <a:bodyPr wrap="square" lIns="0" tIns="0" rIns="0" bIns="0" rtlCol="0" anchor="ctr"/>
+          <a:bodyPr wrap="none" lIns="0" tIns="0" rIns="0" bIns="0" rtlCol="0" anchor="ctr"/>
           <a:lstStyle/>
           <a:p>
             <a:pPr algn="ctr" indent="0" marL="0">
@@ -3722,7 +3722,7 @@
           <a:ln/>
         </p:spPr>
         <p:txBody>
-          <a:bodyPr wrap="square" lIns="0" tIns="0" rIns="0" bIns="0" rtlCol="0" anchor="ctr"/>
+          <a:bodyPr wrap="none" lIns="0" tIns="0" rIns="0" bIns="0" rtlCol="0" anchor="ctr"/>
           <a:lstStyle/>
           <a:p>
             <a:pPr algn="ctr" indent="0" marL="0">
@@ -3765,7 +3765,7 @@
           <a:ln/>
         </p:spPr>
         <p:txBody>
-          <a:bodyPr wrap="square" lIns="0" tIns="0" rIns="0" bIns="0" rtlCol="0" anchor="ctr"/>
+          <a:bodyPr wrap="none" lIns="0" tIns="0" rIns="0" bIns="0" rtlCol="0" anchor="ctr"/>
           <a:lstStyle/>
           <a:p>
             <a:pPr algn="ctr" indent="0" marL="0">
@@ -3808,7 +3808,7 @@
           <a:ln/>
         </p:spPr>
         <p:txBody>
-          <a:bodyPr wrap="square" lIns="0" tIns="0" rIns="0" bIns="0" rtlCol="0" anchor="ctr"/>
+          <a:bodyPr wrap="none" lIns="0" tIns="0" rIns="0" bIns="0" rtlCol="0" anchor="ctr"/>
           <a:lstStyle/>
           <a:p>
             <a:pPr algn="ctr" indent="0" marL="0">
@@ -3851,7 +3851,7 @@
           <a:ln/>
         </p:spPr>
         <p:txBody>
-          <a:bodyPr wrap="square" lIns="0" tIns="0" rIns="0" bIns="0" rtlCol="0" anchor="ctr"/>
+          <a:bodyPr wrap="none" lIns="0" tIns="0" rIns="0" bIns="0" rtlCol="0" anchor="ctr"/>
           <a:lstStyle/>
           <a:p>
             <a:pPr algn="ctr" indent="0" marL="0">
@@ -4751,7 +4751,7 @@
           <a:ln/>
         </p:spPr>
         <p:txBody>
-          <a:bodyPr wrap="square" lIns="0" tIns="0" rIns="0" bIns="0" rtlCol="0" anchor="ctr"/>
+          <a:bodyPr wrap="none" lIns="0" tIns="0" rIns="0" bIns="0" rtlCol="0" anchor="ctr"/>
           <a:lstStyle/>
           <a:p>
             <a:pPr algn="ctr" indent="0" marL="0">
@@ -4794,7 +4794,7 @@
           <a:ln/>
         </p:spPr>
         <p:txBody>
-          <a:bodyPr wrap="square" lIns="0" tIns="0" rIns="0" bIns="0" rtlCol="0" anchor="ctr"/>
+          <a:bodyPr wrap="none" lIns="0" tIns="0" rIns="0" bIns="0" rtlCol="0" anchor="ctr"/>
           <a:lstStyle/>
           <a:p>
             <a:pPr algn="ctr" indent="0" marL="0">
@@ -4837,7 +4837,7 @@
           <a:ln/>
         </p:spPr>
         <p:txBody>
-          <a:bodyPr wrap="square" lIns="0" tIns="0" rIns="0" bIns="0" rtlCol="0" anchor="ctr"/>
+          <a:bodyPr wrap="none" lIns="0" tIns="0" rIns="0" bIns="0" rtlCol="0" anchor="ctr"/>
           <a:lstStyle/>
           <a:p>
             <a:pPr algn="ctr" indent="0" marL="0">
@@ -4880,7 +4880,7 @@
           <a:ln/>
         </p:spPr>
         <p:txBody>
-          <a:bodyPr wrap="square" lIns="0" tIns="0" rIns="0" bIns="0" rtlCol="0" anchor="ctr"/>
+          <a:bodyPr wrap="none" lIns="0" tIns="0" rIns="0" bIns="0" rtlCol="0" anchor="ctr"/>
           <a:lstStyle/>
           <a:p>
             <a:pPr algn="ctr" indent="0" marL="0">
@@ -4923,7 +4923,7 @@
           <a:ln/>
         </p:spPr>
         <p:txBody>
-          <a:bodyPr wrap="square" lIns="0" tIns="0" rIns="0" bIns="0" rtlCol="0" anchor="ctr"/>
+          <a:bodyPr wrap="none" lIns="0" tIns="0" rIns="0" bIns="0" rtlCol="0" anchor="ctr"/>
           <a:lstStyle/>
           <a:p>
             <a:pPr algn="ctr" indent="0" marL="0">
@@ -5736,7 +5736,7 @@
           <a:ln/>
         </p:spPr>
         <p:txBody>
-          <a:bodyPr wrap="square" lIns="0" tIns="0" rIns="0" bIns="0" rtlCol="0" anchor="ctr"/>
+          <a:bodyPr wrap="none" lIns="0" tIns="0" rIns="0" bIns="0" rtlCol="0" anchor="ctr"/>
           <a:lstStyle/>
           <a:p>
             <a:pPr algn="ctr" indent="0" marL="0">
@@ -5779,7 +5779,7 @@
           <a:ln/>
         </p:spPr>
         <p:txBody>
-          <a:bodyPr wrap="square" lIns="0" tIns="0" rIns="0" bIns="0" rtlCol="0" anchor="ctr"/>
+          <a:bodyPr wrap="none" lIns="0" tIns="0" rIns="0" bIns="0" rtlCol="0" anchor="ctr"/>
           <a:lstStyle/>
           <a:p>
             <a:pPr algn="ctr" indent="0" marL="0">
@@ -5822,7 +5822,7 @@
           <a:ln/>
         </p:spPr>
         <p:txBody>
-          <a:bodyPr wrap="square" lIns="0" tIns="0" rIns="0" bIns="0" rtlCol="0" anchor="ctr"/>
+          <a:bodyPr wrap="none" lIns="0" tIns="0" rIns="0" bIns="0" rtlCol="0" anchor="ctr"/>
           <a:lstStyle/>
           <a:p>
             <a:pPr algn="ctr" indent="0" marL="0">
@@ -5865,7 +5865,7 @@
           <a:ln/>
         </p:spPr>
         <p:txBody>
-          <a:bodyPr wrap="square" lIns="0" tIns="0" rIns="0" bIns="0" rtlCol="0" anchor="ctr"/>
+          <a:bodyPr wrap="none" lIns="0" tIns="0" rIns="0" bIns="0" rtlCol="0" anchor="ctr"/>
           <a:lstStyle/>
           <a:p>
             <a:pPr algn="ctr" indent="0" marL="0">
@@ -5908,7 +5908,7 @@
           <a:ln/>
         </p:spPr>
         <p:txBody>
-          <a:bodyPr wrap="square" lIns="0" tIns="0" rIns="0" bIns="0" rtlCol="0" anchor="ctr"/>
+          <a:bodyPr wrap="none" lIns="0" tIns="0" rIns="0" bIns="0" rtlCol="0" anchor="ctr"/>
           <a:lstStyle/>
           <a:p>
             <a:pPr algn="ctr" indent="0" marL="0">
@@ -6744,7 +6744,7 @@
           <a:ln/>
         </p:spPr>
         <p:txBody>
-          <a:bodyPr wrap="square" lIns="0" tIns="0" rIns="0" bIns="0" rtlCol="0" anchor="ctr"/>
+          <a:bodyPr wrap="none" lIns="0" tIns="0" rIns="0" bIns="0" rtlCol="0" anchor="ctr"/>
           <a:lstStyle/>
           <a:p>
             <a:pPr algn="ctr" indent="0" marL="0">
@@ -6787,7 +6787,7 @@
           <a:ln/>
         </p:spPr>
         <p:txBody>
-          <a:bodyPr wrap="square" lIns="0" tIns="0" rIns="0" bIns="0" rtlCol="0" anchor="ctr"/>
+          <a:bodyPr wrap="none" lIns="0" tIns="0" rIns="0" bIns="0" rtlCol="0" anchor="ctr"/>
           <a:lstStyle/>
           <a:p>
             <a:pPr algn="ctr" indent="0" marL="0">
@@ -6830,7 +6830,7 @@
           <a:ln/>
         </p:spPr>
         <p:txBody>
-          <a:bodyPr wrap="square" lIns="0" tIns="0" rIns="0" bIns="0" rtlCol="0" anchor="ctr"/>
+          <a:bodyPr wrap="none" lIns="0" tIns="0" rIns="0" bIns="0" rtlCol="0" anchor="ctr"/>
           <a:lstStyle/>
           <a:p>
             <a:pPr algn="ctr" indent="0" marL="0">
@@ -6873,7 +6873,7 @@
           <a:ln/>
         </p:spPr>
         <p:txBody>
-          <a:bodyPr wrap="square" lIns="0" tIns="0" rIns="0" bIns="0" rtlCol="0" anchor="ctr"/>
+          <a:bodyPr wrap="none" lIns="0" tIns="0" rIns="0" bIns="0" rtlCol="0" anchor="ctr"/>
           <a:lstStyle/>
           <a:p>
             <a:pPr algn="ctr" indent="0" marL="0">
@@ -6916,7 +6916,7 @@
           <a:ln/>
         </p:spPr>
         <p:txBody>
-          <a:bodyPr wrap="square" lIns="0" tIns="0" rIns="0" bIns="0" rtlCol="0" anchor="ctr"/>
+          <a:bodyPr wrap="none" lIns="0" tIns="0" rIns="0" bIns="0" rtlCol="0" anchor="ctr"/>
           <a:lstStyle/>
           <a:p>
             <a:pPr algn="ctr" indent="0" marL="0">
@@ -7748,7 +7748,7 @@
           <a:ln/>
         </p:spPr>
         <p:txBody>
-          <a:bodyPr wrap="square" lIns="0" tIns="0" rIns="0" bIns="0" rtlCol="0" anchor="ctr"/>
+          <a:bodyPr wrap="none" lIns="0" tIns="0" rIns="0" bIns="0" rtlCol="0" anchor="ctr"/>
           <a:lstStyle/>
           <a:p>
             <a:pPr algn="ctr" indent="0" marL="0">
@@ -7791,7 +7791,7 @@
           <a:ln/>
         </p:spPr>
         <p:txBody>
-          <a:bodyPr wrap="square" lIns="0" tIns="0" rIns="0" bIns="0" rtlCol="0" anchor="ctr"/>
+          <a:bodyPr wrap="none" lIns="0" tIns="0" rIns="0" bIns="0" rtlCol="0" anchor="ctr"/>
           <a:lstStyle/>
           <a:p>
             <a:pPr algn="ctr" indent="0" marL="0">
@@ -7834,7 +7834,7 @@
           <a:ln/>
         </p:spPr>
         <p:txBody>
-          <a:bodyPr wrap="square" lIns="0" tIns="0" rIns="0" bIns="0" rtlCol="0" anchor="ctr"/>
+          <a:bodyPr wrap="none" lIns="0" tIns="0" rIns="0" bIns="0" rtlCol="0" anchor="ctr"/>
           <a:lstStyle/>
           <a:p>
             <a:pPr algn="ctr" indent="0" marL="0">
@@ -7877,7 +7877,7 @@
           <a:ln/>
         </p:spPr>
         <p:txBody>
-          <a:bodyPr wrap="square" lIns="0" tIns="0" rIns="0" bIns="0" rtlCol="0" anchor="ctr"/>
+          <a:bodyPr wrap="none" lIns="0" tIns="0" rIns="0" bIns="0" rtlCol="0" anchor="ctr"/>
           <a:lstStyle/>
           <a:p>
             <a:pPr algn="ctr" indent="0" marL="0">
@@ -7920,7 +7920,7 @@
           <a:ln/>
         </p:spPr>
         <p:txBody>
-          <a:bodyPr wrap="square" lIns="0" tIns="0" rIns="0" bIns="0" rtlCol="0" anchor="ctr"/>
+          <a:bodyPr wrap="none" lIns="0" tIns="0" rIns="0" bIns="0" rtlCol="0" anchor="ctr"/>
           <a:lstStyle/>
           <a:p>
             <a:pPr algn="ctr" indent="0" marL="0">
@@ -8815,7 +8815,7 @@
           <a:ln/>
         </p:spPr>
         <p:txBody>
-          <a:bodyPr wrap="square" lIns="0" tIns="0" rIns="0" bIns="0" rtlCol="0" anchor="ctr"/>
+          <a:bodyPr wrap="none" lIns="0" tIns="0" rIns="0" bIns="0" rtlCol="0" anchor="ctr"/>
           <a:lstStyle/>
           <a:p>
             <a:pPr algn="ctr" indent="0" marL="0">
@@ -8858,7 +8858,7 @@
           <a:ln/>
         </p:spPr>
         <p:txBody>
-          <a:bodyPr wrap="square" lIns="0" tIns="0" rIns="0" bIns="0" rtlCol="0" anchor="ctr"/>
+          <a:bodyPr wrap="none" lIns="0" tIns="0" rIns="0" bIns="0" rtlCol="0" anchor="ctr"/>
           <a:lstStyle/>
           <a:p>
             <a:pPr algn="ctr" indent="0" marL="0">
@@ -8901,7 +8901,7 @@
           <a:ln/>
         </p:spPr>
         <p:txBody>
-          <a:bodyPr wrap="square" lIns="0" tIns="0" rIns="0" bIns="0" rtlCol="0" anchor="ctr"/>
+          <a:bodyPr wrap="none" lIns="0" tIns="0" rIns="0" bIns="0" rtlCol="0" anchor="ctr"/>
           <a:lstStyle/>
           <a:p>
             <a:pPr algn="ctr" indent="0" marL="0">
@@ -8944,7 +8944,7 @@
           <a:ln/>
         </p:spPr>
         <p:txBody>
-          <a:bodyPr wrap="square" lIns="0" tIns="0" rIns="0" bIns="0" rtlCol="0" anchor="ctr"/>
+          <a:bodyPr wrap="none" lIns="0" tIns="0" rIns="0" bIns="0" rtlCol="0" anchor="ctr"/>
           <a:lstStyle/>
           <a:p>
             <a:pPr algn="ctr" indent="0" marL="0">
@@ -8987,7 +8987,7 @@
           <a:ln/>
         </p:spPr>
         <p:txBody>
-          <a:bodyPr wrap="square" lIns="0" tIns="0" rIns="0" bIns="0" rtlCol="0" anchor="ctr"/>
+          <a:bodyPr wrap="none" lIns="0" tIns="0" rIns="0" bIns="0" rtlCol="0" anchor="ctr"/>
           <a:lstStyle/>
           <a:p>
             <a:pPr algn="ctr" indent="0" marL="0">
@@ -9789,7 +9789,7 @@
           <a:ln/>
         </p:spPr>
         <p:txBody>
-          <a:bodyPr wrap="square" lIns="0" tIns="0" rIns="0" bIns="0" rtlCol="0" anchor="ctr"/>
+          <a:bodyPr wrap="none" lIns="0" tIns="0" rIns="0" bIns="0" rtlCol="0" anchor="ctr"/>
           <a:lstStyle/>
           <a:p>
             <a:pPr algn="ctr" indent="0" marL="0">
@@ -9832,7 +9832,7 @@
           <a:ln/>
         </p:spPr>
         <p:txBody>
-          <a:bodyPr wrap="square" lIns="0" tIns="0" rIns="0" bIns="0" rtlCol="0" anchor="ctr"/>
+          <a:bodyPr wrap="none" lIns="0" tIns="0" rIns="0" bIns="0" rtlCol="0" anchor="ctr"/>
           <a:lstStyle/>
           <a:p>
             <a:pPr algn="ctr" indent="0" marL="0">
@@ -9875,7 +9875,7 @@
           <a:ln/>
         </p:spPr>
         <p:txBody>
-          <a:bodyPr wrap="square" lIns="0" tIns="0" rIns="0" bIns="0" rtlCol="0" anchor="ctr"/>
+          <a:bodyPr wrap="none" lIns="0" tIns="0" rIns="0" bIns="0" rtlCol="0" anchor="ctr"/>
           <a:lstStyle/>
           <a:p>
             <a:pPr algn="ctr" indent="0" marL="0">
@@ -9918,7 +9918,7 @@
           <a:ln/>
         </p:spPr>
         <p:txBody>
-          <a:bodyPr wrap="square" lIns="0" tIns="0" rIns="0" bIns="0" rtlCol="0" anchor="ctr"/>
+          <a:bodyPr wrap="none" lIns="0" tIns="0" rIns="0" bIns="0" rtlCol="0" anchor="ctr"/>
           <a:lstStyle/>
           <a:p>
             <a:pPr algn="ctr" indent="0" marL="0">
@@ -9961,7 +9961,7 @@
           <a:ln/>
         </p:spPr>
         <p:txBody>
-          <a:bodyPr wrap="square" lIns="0" tIns="0" rIns="0" bIns="0" rtlCol="0" anchor="ctr"/>
+          <a:bodyPr wrap="none" lIns="0" tIns="0" rIns="0" bIns="0" rtlCol="0" anchor="ctr"/>
           <a:lstStyle/>
           <a:p>
             <a:pPr algn="ctr" indent="0" marL="0">
